--- a/presentation.pptx
+++ b/presentation.pptx
@@ -9,6 +9,7 @@
     <p:sldId id="257" r:id="rId9"/>
     <p:sldId id="258" r:id="rId10"/>
     <p:sldId id="259" r:id="rId11"/>
+    <p:sldId id="260" r:id="rId12"/>
   </p:sldIdLst>
   <p:sldSz cx="9144000" cy="6858000" type="screen4x3"/>
   <p:notesSz cx="6858000" cy="9144000"/>
@@ -505,7 +506,7 @@
           <a:lstStyle/>
           <a:p>
             <a:r>
-              <a:t>Apresentar o tema e explicar que a aula vai focar em trocas simples que reduzem calorias e aumentam nutrientes.</a:t>
+              <a:t>Apresentar o tema do vídeo e despertar a curiosidade dos alunos sobre a importância de assistir a todos os jogos da Copa.</a:t>
             </a:r>
           </a:p>
         </p:txBody>
@@ -575,7 +576,7 @@
           <a:lstStyle/>
           <a:p>
             <a:r>
-              <a:t>Comparar visualmente as duas versões e reforçar a ideia de que pequenas mudanças trazem grande diferença calórica.</a:t>
+              <a:t>Explicar que cada pessoa tem preferências diferentes e que as listas podem afastar o público de vivenciar momentos inesperados.</a:t>
             </a:r>
           </a:p>
         </p:txBody>
@@ -645,7 +646,7 @@
           <a:lstStyle/>
           <a:p>
             <a:r>
-              <a:t>Explicar que o açaí é saudável quando consumido sem xaropes ou chocolate, e que frutas dão textura e sabor sem calorias extras.</a:t>
+              <a:t>Enfatizar que cada partida tem seu valor emocional e histórico, usando o exemplo pessoal do narrador para ilustrar.</a:t>
             </a:r>
           </a:p>
         </p:txBody>
@@ -715,7 +716,77 @@
           <a:lstStyle/>
           <a:p>
             <a:r>
-              <a:t>Enfatizar que a troca de bebidas pode ser tão eficaz quanto a mudança de alimentos; convidar os alunos a seguir a referência para motivação contínua.</a:t>
+              <a:t>Destacar como assistir ao vivo cria memórias marcantes e fortalece laços sociais.</a:t>
+            </a:r>
+          </a:p>
+        </p:txBody>
+      </p:sp>
+      <p:sp>
+        <p:nvSpPr>
+          <p:cNvPr id="4" name="Slide Number Placeholder 3"/>
+          <p:cNvSpPr>
+            <a:spLocks noGrp="1"/>
+          </p:cNvSpPr>
+          <p:nvPr>
+            <p:ph type="sldNum" idx="5" sz="quarter"/>
+          </p:nvPr>
+        </p:nvSpPr>
+        <p:spPr/>
+      </p:sp>
+    </p:spTree>
+  </p:cSld>
+  <p:clrMapOvr>
+    <a:masterClrMapping/>
+  </p:clrMapOvr>
+</p:notes>
+</file>
+
+<file path=ppt/notesSlides/notesSlide5.xml><?xml version="1.0" encoding="utf-8"?>
+<p:notes xmlns:a="http://schemas.openxmlformats.org/drawingml/2006/main" xmlns:p="http://schemas.openxmlformats.org/presentationml/2006/main" xmlns:r="http://schemas.openxmlformats.org/officeDocument/2006/relationships">
+  <p:cSld>
+    <p:spTree>
+      <p:nvGrpSpPr>
+        <p:cNvPr id="1" name=""/>
+        <p:cNvGrpSpPr/>
+        <p:nvPr/>
+      </p:nvGrpSpPr>
+      <p:grpSpPr>
+        <a:xfrm>
+          <a:off x="0" y="0"/>
+          <a:ext cx="0" cy="0"/>
+          <a:chOff x="0" y="0"/>
+          <a:chExt cx="0" cy="0"/>
+        </a:xfrm>
+      </p:grpSpPr>
+      <p:sp>
+        <p:nvSpPr>
+          <p:cNvPr id="2" name="Slide Image Placeholder 1"/>
+          <p:cNvSpPr>
+            <a:spLocks noGrp="1"/>
+          </p:cNvSpPr>
+          <p:nvPr>
+            <p:ph type="sldImg" idx="2"/>
+          </p:nvPr>
+        </p:nvSpPr>
+        <p:spPr/>
+      </p:sp>
+      <p:sp>
+        <p:nvSpPr>
+          <p:cNvPr id="3" name="Notes Placeholder 2"/>
+          <p:cNvSpPr>
+            <a:spLocks noGrp="1"/>
+          </p:cNvSpPr>
+          <p:nvPr>
+            <p:ph type="body" idx="3" sz="quarter"/>
+          </p:nvPr>
+        </p:nvSpPr>
+        <p:spPr/>
+        <p:txBody>
+          <a:bodyPr/>
+          <a:lstStyle/>
+          <a:p>
+            <a:r>
+              <a:t>Encerrar motivando os alunos a assistir a todas as partidas, reforçando a ideia de que cada jogo tem algo a oferecer.</a:t>
             </a:r>
           </a:p>
         </p:txBody>
@@ -3830,7 +3901,7 @@
                   <a:srgbClr val="FFFFFF"/>
                 </a:solidFill>
               </a:rPr>
-              <a:t>O vídeo mostra como substituir alimentos ricos em calorias vazias por opções mais saudáveis</a:t>
+              <a:t>Contextualização da lista de jogos recomendados</a:t>
             </a:r>
           </a:p>
           <a:p>
@@ -3845,7 +3916,7 @@
                   <a:srgbClr val="FFFFFF"/>
                 </a:solidFill>
               </a:rPr>
-              <a:t>Objetivo: melhorar a alimentação sem abrir mão do sabor</a:t>
+              <a:t>Crítica ao conselho "descanse e aproveite a vida"</a:t>
             </a:r>
           </a:p>
         </p:txBody>
@@ -3963,7 +4034,7 @@
                   <a:srgbClr val="FFFFFF"/>
                 </a:solidFill>
               </a:rPr>
-              <a:t>Trocas Inteligentes – Milho e Queijo</a:t>
+              <a:t>Por que não seguir listas de "melhores" jogos</a:t>
             </a:r>
           </a:p>
         </p:txBody>
@@ -4001,7 +4072,7 @@
                   <a:srgbClr val="FFFFFF"/>
                 </a:solidFill>
               </a:rPr>
-              <a:t>Milho com manteiga → Milho sem manteiga (80 kcal por porção)</a:t>
+              <a:t>Listas limitam a experiência de torcer</a:t>
             </a:r>
           </a:p>
           <a:p>
@@ -4016,7 +4087,7 @@
                   <a:srgbClr val="FFFFFF"/>
                 </a:solidFill>
               </a:rPr>
-              <a:t>Queijo coalho com melaço → Queijo coalho puro (fonte de proteína)</a:t>
+              <a:t>O valor subjetivo de cada partida</a:t>
             </a:r>
           </a:p>
           <a:p>
@@ -4031,7 +4102,7 @@
                   <a:srgbClr val="FFFFFF"/>
                 </a:solidFill>
               </a:rPr>
-              <a:t>Destaque: manter a saciedade com menos açúcar e gordura</a:t>
+              <a:t>Risco de perder momentos únicos</a:t>
             </a:r>
           </a:p>
         </p:txBody>
@@ -4149,7 +4220,7 @@
                   <a:srgbClr val="FFFFFF"/>
                 </a:solidFill>
               </a:rPr>
-              <a:t>Açaí e Snacks</a:t>
+              <a:t>Todos os jogos valem a pena</a:t>
             </a:r>
           </a:p>
         </p:txBody>
@@ -4187,7 +4258,7 @@
                   <a:srgbClr val="FFFFFF"/>
                 </a:solidFill>
               </a:rPr>
-              <a:t>Açaí puro (300 ml) + morangos ou paçoquinha → Fonte de gorduras boas e antioxidantes</a:t>
+              <a:t>A Copa acontece a cada 4 anos – oportunidade rara</a:t>
             </a:r>
           </a:p>
           <a:p>
@@ -4202,7 +4273,7 @@
                   <a:srgbClr val="FFFFFF"/>
                 </a:solidFill>
               </a:rPr>
-              <a:t>Evitar M&amp;M’s, sucrilhos e demais doces adicionados</a:t>
+              <a:t>Jogadores dão vida ao campo, independentemente da técnica</a:t>
             </a:r>
           </a:p>
           <a:p>
@@ -4217,7 +4288,7 @@
                   <a:srgbClr val="FFFFFF"/>
                 </a:solidFill>
               </a:rPr>
-              <a:t>Sugestão de topping: granola sem açúcar ou frutas frescas</a:t>
+              <a:t>Exemplos citados: Coreia do Sul vs. Tcheca, gol do BTS</a:t>
             </a:r>
           </a:p>
         </p:txBody>
@@ -4335,7 +4406,7 @@
                   <a:srgbClr val="FFFFFF"/>
                 </a:solidFill>
               </a:rPr>
-              <a:t>Bebidas Alcoólicas e Conclusão</a:t>
+              <a:t>Impacto emocional dos jogos</a:t>
             </a:r>
           </a:p>
         </p:txBody>
@@ -4373,7 +4444,7 @@
                   <a:srgbClr val="FFFFFF"/>
                 </a:solidFill>
               </a:rPr>
-              <a:t>Cerveja tradicional → Amistel Ultra (baixo teor calórico e sem álcool)</a:t>
+              <a:t>Conexão com milhões de torcedores simultaneamente</a:t>
             </a:r>
           </a:p>
           <a:p>
@@ -4388,7 +4459,7 @@
                   <a:srgbClr val="FFFFFF"/>
                 </a:solidFill>
               </a:rPr>
-              <a:t>Benefícios: hidratação, menos “pochete” e manutenção do shape</a:t>
+              <a:t>Momento inesperado: vibração coletiva às 4h da manhã</a:t>
             </a:r>
           </a:p>
           <a:p>
@@ -4403,7 +4474,7 @@
                   <a:srgbClr val="FFFFFF"/>
                 </a:solidFill>
               </a:rPr>
-              <a:t>Encerramento: seguir o perfil @Bruna7 para dicas de forma simples e sem frescura</a:t>
+              <a:t>Sentimento de comunidade global</a:t>
             </a:r>
           </a:p>
         </p:txBody>
@@ -4411,6 +4482,192 @@
       <p:pic>
         <p:nvPicPr>
           <p:cNvPr id="5" name="Picture 4" descr="frame_0004.jpg"/>
+          <p:cNvPicPr>
+            <a:picLocks noChangeAspect="1"/>
+          </p:cNvPicPr>
+          <p:nvPr/>
+        </p:nvPicPr>
+        <p:blipFill>
+          <a:blip r:embed="rId2"/>
+          <a:stretch>
+            <a:fillRect/>
+          </a:stretch>
+        </p:blipFill>
+        <p:spPr>
+          <a:xfrm>
+            <a:off x="4929187" y="0"/>
+            <a:ext cx="3857625" cy="6858000"/>
+          </a:xfrm>
+          <a:prstGeom prst="rect">
+            <a:avLst/>
+          </a:prstGeom>
+        </p:spPr>
+      </p:pic>
+    </p:spTree>
+  </p:cSld>
+  <p:clrMapOvr>
+    <a:masterClrMapping/>
+  </p:clrMapOvr>
+</p:sld>
+</file>
+
+<file path=ppt/slides/slide5.xml><?xml version="1.0" encoding="utf-8"?>
+<p:sld xmlns:a="http://schemas.openxmlformats.org/drawingml/2006/main" xmlns:p="http://schemas.openxmlformats.org/presentationml/2006/main" xmlns:r="http://schemas.openxmlformats.org/officeDocument/2006/relationships">
+  <p:cSld>
+    <p:spTree>
+      <p:nvGrpSpPr>
+        <p:cNvPr id="1" name=""/>
+        <p:cNvGrpSpPr/>
+        <p:nvPr/>
+      </p:nvGrpSpPr>
+      <p:grpSpPr/>
+      <p:sp>
+        <p:nvSpPr>
+          <p:cNvPr id="2" name="Rectangle 1"/>
+          <p:cNvSpPr/>
+          <p:nvPr/>
+        </p:nvSpPr>
+        <p:spPr>
+          <a:xfrm>
+            <a:off x="0" y="0"/>
+            <a:ext cx="4572000" cy="6858000"/>
+          </a:xfrm>
+          <a:prstGeom prst="rect">
+            <a:avLst/>
+          </a:prstGeom>
+          <a:solidFill>
+            <a:srgbClr val="000000"/>
+          </a:solidFill>
+          <a:ln>
+            <a:noFill/>
+          </a:ln>
+        </p:spPr>
+        <p:style>
+          <a:lnRef idx="1">
+            <a:schemeClr val="accent1"/>
+          </a:lnRef>
+          <a:fillRef idx="3">
+            <a:schemeClr val="accent1"/>
+          </a:fillRef>
+          <a:effectRef idx="2">
+            <a:schemeClr val="accent1"/>
+          </a:effectRef>
+          <a:fontRef idx="minor">
+            <a:schemeClr val="lt1"/>
+          </a:fontRef>
+        </p:style>
+        <p:txBody>
+          <a:bodyPr rtlCol="0" anchor="ctr"/>
+          <a:lstStyle/>
+          <a:p>
+            <a:pPr algn="ctr"/>
+          </a:p>
+        </p:txBody>
+      </p:sp>
+      <p:sp>
+        <p:nvSpPr>
+          <p:cNvPr id="3" name="TextBox 2"/>
+          <p:cNvSpPr txBox="1"/>
+          <p:nvPr/>
+        </p:nvSpPr>
+        <p:spPr>
+          <a:xfrm>
+            <a:off x="360000" y="1028700"/>
+            <a:ext cx="3852000" cy="1028700"/>
+          </a:xfrm>
+          <a:prstGeom prst="rect">
+            <a:avLst/>
+          </a:prstGeom>
+          <a:noFill/>
+        </p:spPr>
+        <p:txBody>
+          <a:bodyPr wrap="square">
+            <a:spAutoFit/>
+          </a:bodyPr>
+          <a:lstStyle/>
+          <a:p>
+            <a:r>
+              <a:rPr b="1" sz="2800">
+                <a:solidFill>
+                  <a:srgbClr val="FFFFFF"/>
+                </a:solidFill>
+              </a:rPr>
+              <a:t>Convite à prática</a:t>
+            </a:r>
+          </a:p>
+        </p:txBody>
+      </p:sp>
+      <p:sp>
+        <p:nvSpPr>
+          <p:cNvPr id="4" name="TextBox 3"/>
+          <p:cNvSpPr txBox="1"/>
+          <p:nvPr/>
+        </p:nvSpPr>
+        <p:spPr>
+          <a:xfrm>
+            <a:off x="360000" y="2257400"/>
+            <a:ext cx="3852000" cy="4240600"/>
+          </a:xfrm>
+          <a:prstGeom prst="rect">
+            <a:avLst/>
+          </a:prstGeom>
+          <a:noFill/>
+        </p:spPr>
+        <p:txBody>
+          <a:bodyPr wrap="square">
+            <a:normAutofit/>
+          </a:bodyPr>
+          <a:lstStyle/>
+          <a:p>
+            <a:pPr>
+              <a:spcAft>
+                <a:spcPts val="600"/>
+              </a:spcAft>
+            </a:pPr>
+            <a:r>
+              <a:rPr sz="1600">
+                <a:solidFill>
+                  <a:srgbClr val="FFFFFF"/>
+                </a:solidFill>
+              </a:rPr>
+              <a:t>Assista a todos os jogos da fase de grupos</a:t>
+            </a:r>
+          </a:p>
+          <a:p>
+            <a:pPr>
+              <a:spcAft>
+                <a:spcPts val="600"/>
+              </a:spcAft>
+            </a:pPr>
+            <a:r>
+              <a:rPr sz="1600">
+                <a:solidFill>
+                  <a:srgbClr val="FFFFFF"/>
+                </a:solidFill>
+              </a:rPr>
+              <a:t>Desfrute da diversidade de estilos e histórias</a:t>
+            </a:r>
+          </a:p>
+          <a:p>
+            <a:pPr>
+              <a:spcAft>
+                <a:spcPts val="600"/>
+              </a:spcAft>
+            </a:pPr>
+            <a:r>
+              <a:rPr sz="1600">
+                <a:solidFill>
+                  <a:srgbClr val="FFFFFF"/>
+                </a:solidFill>
+              </a:rPr>
+              <a:t>Valorize cada minuto da competição</a:t>
+            </a:r>
+          </a:p>
+        </p:txBody>
+      </p:sp>
+      <p:pic>
+        <p:nvPicPr>
+          <p:cNvPr id="5" name="Picture 4" descr="frame_0005.jpg"/>
           <p:cNvPicPr>
             <a:picLocks noChangeAspect="1"/>
           </p:cNvPicPr>
